--- a/Artificial Intelligence Fall 2026/slides/out/AI_Ch01_What_Artificial_Intelligence_Is.pptx
+++ b/Artificial Intelligence Fall 2026/slides/out/AI_Ch01_What_Artificial_Intelligence_Is.pptx
@@ -149,7 +149,7 @@
   <p:extLst>
     <p:ext uri="{521415D9-36F7-43E2-AB2F-B90AF26B5E84}">
       <p14:sectionLst xmlns:p14="http://schemas.microsoft.com/office/powerpoint/2010/main">
-        <p14:section name="Opening" id="{DF07EEC0-0FB1-4EB9-83B5-FE92757F553E}">
+        <p14:section name="Opening" id="{68117843-C86F-4DED-997A-0645720CB0F1}">
           <p14:sldIdLst>
             <p14:sldId id="256"/>
             <p14:sldId id="257"/>
@@ -158,31 +158,31 @@
             <p14:sldId id="260"/>
           </p14:sldIdLst>
         </p14:section>
-        <p14:section name="1.1 Two Programs in a Project Office" id="{53D89CFF-5640-4363-9019-5CB40D833183}">
+        <p14:section name="1.1 Two Programs in a Project Office" id="{2947BAE3-3A65-4134-BEA3-6B47410FE210}">
           <p14:sldIdLst>
             <p14:sldId id="261"/>
           </p14:sldIdLst>
         </p14:section>
-        <p14:section name="1.2 Four Definitions, Two Axes" id="{41B1FCD6-4259-4A68-9BD3-5A8EDB9AA355}">
+        <p14:section name="1.2 Four Definitions, Two Axes" id="{2EEC561C-AF3A-405F-8EA1-2F8B66182309}">
           <p14:sldIdLst>
             <p14:sldId id="262"/>
             <p14:sldId id="263"/>
             <p14:sldId id="264"/>
           </p14:sldIdLst>
         </p14:section>
-        <p14:section name="1.3 Is It AI? A Checklist" id="{29F33A6A-B91A-4067-B690-03FA09ADDC7A}">
+        <p14:section name="1.3 Is It AI? A Checklist" id="{872DBC13-7C59-467B-A760-222E60E3F977}">
           <p14:sldIdLst>
             <p14:sldId id="265"/>
             <p14:sldId id="266"/>
             <p14:sldId id="267"/>
           </p14:sldIdLst>
         </p14:section>
-        <p14:section name="1.4 The Branches of AI" id="{79F41A2E-1410-42AD-A648-0B9FBEC18D86}">
+        <p14:section name="1.4 The Branches of AI" id="{9CA67B67-3A41-4525-B2C9-51B3CA78036E}">
           <p14:sldIdLst>
             <p14:sldId id="268"/>
           </p14:sldIdLst>
         </p14:section>
-        <p14:section name="1.5 Sixty Years in Five Waves" id="{8A1BCC0F-D1D4-4B44-88EA-0F755ADA05A2}">
+        <p14:section name="1.5 Sixty Years in Five Waves" id="{C159B296-1BBC-45B8-A1C1-DEB2B32FE7F1}">
           <p14:sldIdLst>
             <p14:sldId id="269"/>
             <p14:sldId id="270"/>
@@ -190,7 +190,7 @@
             <p14:sldId id="272"/>
           </p14:sldIdLst>
         </p14:section>
-        <p14:section name="1.6 What This Course Teaches, and What It Does Not" id="{C55BFBD9-7864-4879-B9CA-191F7EC6DD62}">
+        <p14:section name="1.6 What This Course Teaches, and What It Does Not" id="{22595663-510F-423B-AAED-927752DAA4B9}">
           <p14:sldIdLst>
             <p14:sldId id="273"/>
             <p14:sldId id="274"/>
@@ -198,12 +198,12 @@
             <p14:sldId id="276"/>
           </p14:sldIdLst>
         </p14:section>
-        <p14:section name="Pitfalls" id="{6904B8EF-D62F-4334-97CE-571ABA5F6618}">
+        <p14:section name="Pitfalls" id="{D7350713-7C01-4644-9365-2EE8DE8C152E}">
           <p14:sldIdLst>
             <p14:sldId id="277"/>
           </p14:sldIdLst>
         </p14:section>
-        <p14:section name="Lab" id="{BC9110D9-404F-48C1-BEFE-1224C3D5E283}">
+        <p14:section name="Lab" id="{818E0A16-10B8-4C75-AD39-6649B96F16ED}">
           <p14:sldIdLst>
             <p14:sldId id="278"/>
             <p14:sldId id="279"/>
@@ -214,7 +214,7 @@
             <p14:sldId id="284"/>
           </p14:sldIdLst>
         </p14:section>
-        <p14:section name="Checkpoint" id="{3751ECAB-4391-46E6-BD60-686F3B6DD0BF}">
+        <p14:section name="Checkpoint" id="{9CE44F39-ABA5-4CF1-9D06-F333E35C65E7}">
           <p14:sldIdLst>
             <p14:sldId id="285"/>
             <p14:sldId id="286"/>
@@ -224,7 +224,7 @@
             <p14:sldId id="290"/>
           </p14:sldIdLst>
         </p14:section>
-        <p14:section name="Wrap-up" id="{52E30601-831B-4F66-B8E1-5A49AFB7A522}">
+        <p14:section name="Wrap-up" id="{FB72142C-8A57-4D07-9AD8-B52847B78C91}">
           <p14:sldIdLst>
             <p14:sldId id="291"/>
             <p14:sldId id="292"/>
@@ -7769,7 +7769,7 @@
               </a:rPr>
               <a:t>Handout §1.3     </a:t>
             </a:r>
-            <a:fld id="{DE7EDD04-312F-4F8B-8972-366B86A6E286}" type="slidenum">
+            <a:fld id="{043978FA-CF42-4430-9F08-1FDBFE282942}" type="slidenum">
               <a:rPr lang="en-GB" sz="1000">
                 <a:solidFill>
                   <a:srgbClr val="8795A1"/>
@@ -8108,7 +8108,7 @@
               </a:rPr>
               <a:t>§1.3  ·  Handout p. 5     </a:t>
             </a:r>
-            <a:fld id="{9AF590BB-206F-454F-863E-56153F24D3C4}" type="slidenum">
+            <a:fld id="{89E385B4-48AB-4458-8101-CF9EB1735E02}" type="slidenum">
               <a:rPr lang="en-GB" sz="1000">
                 <a:solidFill>
                   <a:srgbClr val="8795A1"/>
@@ -9242,7 +9242,7 @@
               </a:rPr>
               <a:t>§1.3  ·  Handout p. 5     </a:t>
             </a:r>
-            <a:fld id="{B11AFC3B-1395-477B-9E60-96CB9F38CEEA}" type="slidenum">
+            <a:fld id="{80A21BCA-CE70-4795-A58A-F93883E79020}" type="slidenum">
               <a:rPr lang="en-GB" sz="1000">
                 <a:solidFill>
                   <a:srgbClr val="8795A1"/>
@@ -11340,7 +11340,7 @@
               </a:rPr>
               <a:t>§1.4  ·  Handout p. 6     </a:t>
             </a:r>
-            <a:fld id="{8FDF913F-EBA0-4EE5-B909-9F47CF09CC04}" type="slidenum">
+            <a:fld id="{0B093333-0EAA-41A6-8412-898F83779FCF}" type="slidenum">
               <a:rPr lang="en-GB" sz="1000">
                 <a:solidFill>
                   <a:srgbClr val="8795A1"/>
@@ -12133,7 +12133,7 @@
               </a:rPr>
               <a:t>Handout §1.5     </a:t>
             </a:r>
-            <a:fld id="{42CCC0E7-BF87-4944-85C4-BE58922653AC}" type="slidenum">
+            <a:fld id="{75DDB349-2AAA-48CB-A123-B58CE373A6DA}" type="slidenum">
               <a:rPr lang="en-GB" sz="1000">
                 <a:solidFill>
                   <a:srgbClr val="8795A1"/>
@@ -12472,7 +12472,7 @@
               </a:rPr>
               <a:t>§1.5  ·  Handout p. 6     </a:t>
             </a:r>
-            <a:fld id="{E7B17D55-B2C4-426D-B95E-0D613ABD52F2}" type="slidenum">
+            <a:fld id="{65601979-C6A7-43E5-849C-EC782461BCB2}" type="slidenum">
               <a:rPr lang="en-GB" sz="1000">
                 <a:solidFill>
                   <a:srgbClr val="8795A1"/>
@@ -13579,7 +13579,7 @@
               </a:rPr>
               <a:t>§1.5  ·  Handout p. 6     </a:t>
             </a:r>
-            <a:fld id="{184571E8-E84D-4D02-A9EC-98B9D5F2B8D2}" type="slidenum">
+            <a:fld id="{786D0329-27B3-41F3-A789-46FB6024E6E1}" type="slidenum">
               <a:rPr lang="en-GB" sz="1000">
                 <a:solidFill>
                   <a:srgbClr val="8795A1"/>
@@ -13601,7 +13601,7 @@
         </p:nvGraphicFramePr>
         <p:xfrm>
           <a:off x="658368" y="1737360"/>
-          <a:ext cx="10874958" cy="4023360"/>
+          <a:ext cx="10874958" cy="2779776"/>
         </p:xfrm>
         <a:graphic>
           <a:graphicData uri="http://schemas.openxmlformats.org/drawingml/2006/table">
@@ -14009,11 +14009,13 @@
                     <a:lnR w="0" cmpd="sng">
                       <a:noFill/>
                     </a:lnR>
-                    <a:lnT w="9525" cmpd="sng">
+                    <a:lnT w="19050" cmpd="sng">
                       <a:noFill/>
                     </a:lnT>
-                    <a:lnB w="9525" cmpd="sng">
-                      <a:noFill/>
+                    <a:lnB w="19050" cmpd="sng">
+                      <a:solidFill>
+                        <a:srgbClr val="1A5276"/>
+                      </a:solidFill>
                     </a:lnB>
                     <a:solidFill>
                       <a:srgbClr val="FFFFFF"/>
@@ -14045,11 +14047,13 @@
                     <a:lnR w="0" cmpd="sng">
                       <a:noFill/>
                     </a:lnR>
-                    <a:lnT w="9525" cmpd="sng">
+                    <a:lnT w="19050" cmpd="sng">
                       <a:noFill/>
                     </a:lnT>
-                    <a:lnB w="9525" cmpd="sng">
-                      <a:noFill/>
+                    <a:lnB w="19050" cmpd="sng">
+                      <a:solidFill>
+                        <a:srgbClr val="1A5276"/>
+                      </a:solidFill>
                     </a:lnB>
                     <a:solidFill>
                       <a:srgbClr val="FFFFFF"/>
@@ -14081,44 +14085,6 @@
                     <a:lnR w="0" cmpd="sng">
                       <a:noFill/>
                     </a:lnR>
-                    <a:lnT w="9525" cmpd="sng">
-                      <a:noFill/>
-                    </a:lnT>
-                    <a:lnB w="9525" cmpd="sng">
-                      <a:noFill/>
-                    </a:lnB>
-                    <a:solidFill>
-                      <a:srgbClr val="FFFFFF"/>
-                    </a:solidFill>
-                  </a:tcPr>
-                </a:tc>
-              </a:tr>
-              <a:tr h="1243584">
-                <a:tc>
-                  <a:txBody>
-                    <a:bodyPr wrap="square"/>
-                    <a:lstStyle/>
-                    <a:p>
-                      <a:pPr algn="l"/>
-                      <a:r>
-                        <a:rPr sz="1200" b="0" i="0">
-                          <a:solidFill>
-                            <a:srgbClr val="1C252B"/>
-                          </a:solidFill>
-                          <a:latin typeface="Segoe UI"/>
-                        </a:rPr>
-                        <a:t>Five waves and two winters. Each collapse followed a real achievement that was mistaken for a general one.</a:t>
-                      </a:r>
-                      <a:endParaRPr sz="1200"/>
-                    </a:p>
-                  </a:txBody>
-                  <a:tcPr marL="109728" marR="109728" marT="64008" marB="45720" anchor="t">
-                    <a:lnL w="0" cmpd="sng">
-                      <a:noFill/>
-                    </a:lnL>
-                    <a:lnR w="0" cmpd="sng">
-                      <a:noFill/>
-                    </a:lnR>
                     <a:lnT w="19050" cmpd="sng">
                       <a:noFill/>
                     </a:lnT>
@@ -14128,65 +14094,7 @@
                       </a:solidFill>
                     </a:lnB>
                     <a:solidFill>
-                      <a:srgbClr val="F2F8FC"/>
-                    </a:solidFill>
-                  </a:tcPr>
-                </a:tc>
-                <a:tc>
-                  <a:txBody>
-                    <a:bodyPr wrap="square"/>
-                    <a:lstStyle/>
-                    <a:p>
-                      <a:pPr algn="l"/>
-                      <a:endParaRPr sz="1200"/>
-                    </a:p>
-                  </a:txBody>
-                  <a:tcPr marL="109728" marR="109728" marT="64008" marB="45720" anchor="t">
-                    <a:lnL w="0" cmpd="sng">
-                      <a:noFill/>
-                    </a:lnL>
-                    <a:lnR w="0" cmpd="sng">
-                      <a:noFill/>
-                    </a:lnR>
-                    <a:lnT w="19050" cmpd="sng">
-                      <a:noFill/>
-                    </a:lnT>
-                    <a:lnB w="19050" cmpd="sng">
-                      <a:solidFill>
-                        <a:srgbClr val="1A5276"/>
-                      </a:solidFill>
-                    </a:lnB>
-                    <a:solidFill>
-                      <a:srgbClr val="F2F8FC"/>
-                    </a:solidFill>
-                  </a:tcPr>
-                </a:tc>
-                <a:tc>
-                  <a:txBody>
-                    <a:bodyPr wrap="square"/>
-                    <a:lstStyle/>
-                    <a:p>
-                      <a:pPr algn="l"/>
-                      <a:endParaRPr sz="1200"/>
-                    </a:p>
-                  </a:txBody>
-                  <a:tcPr marL="109728" marR="109728" marT="64008" marB="45720" anchor="t">
-                    <a:lnL w="0" cmpd="sng">
-                      <a:noFill/>
-                    </a:lnL>
-                    <a:lnR w="0" cmpd="sng">
-                      <a:noFill/>
-                    </a:lnR>
-                    <a:lnT w="19050" cmpd="sng">
-                      <a:noFill/>
-                    </a:lnT>
-                    <a:lnB w="19050" cmpd="sng">
-                      <a:solidFill>
-                        <a:srgbClr val="1A5276"/>
-                      </a:solidFill>
-                    </a:lnB>
-                    <a:solidFill>
-                      <a:srgbClr val="F2F8FC"/>
+                      <a:srgbClr val="FFFFFF"/>
                     </a:solidFill>
                   </a:tcPr>
                 </a:tc>
@@ -14522,7 +14430,7 @@
               </a:rPr>
               <a:t>§1.5  ·  Handout p. 6     </a:t>
             </a:r>
-            <a:fld id="{9FF5E06A-FF9D-4E6B-86A2-DBDE37DE7375}" type="slidenum">
+            <a:fld id="{9B7C571C-0AD2-47A7-9F26-7932BF8D4FF3}" type="slidenum">
               <a:rPr lang="en-GB" sz="1000">
                 <a:solidFill>
                   <a:srgbClr val="8795A1"/>
@@ -15406,7 +15314,7 @@
               </a:rPr>
               <a:t>Handout §1.6     </a:t>
             </a:r>
-            <a:fld id="{73E88652-9AA0-4B9D-947F-9E86DF2B536D}" type="slidenum">
+            <a:fld id="{A6F818A9-6202-4A4D-AEED-4868E18EFA29}" type="slidenum">
               <a:rPr lang="en-GB" sz="1000">
                 <a:solidFill>
                   <a:srgbClr val="8795A1"/>
@@ -15709,7 +15617,7 @@
               </a:rPr>
               <a:t>§1.6  ·  Handout p. 8     </a:t>
             </a:r>
-            <a:fld id="{C0E13FBA-83DF-4430-B310-431EE53A00B2}" type="slidenum">
+            <a:fld id="{43AEE4C5-3A3A-4454-969A-6156E851015E}" type="slidenum">
               <a:rPr lang="en-GB" sz="1000">
                 <a:solidFill>
                   <a:srgbClr val="8795A1"/>
@@ -16173,7 +16081,7 @@
               </a:rPr>
               <a:t>Handout p. 3     </a:t>
             </a:r>
-            <a:fld id="{F002DD1D-3ACD-4832-BE1E-C64ABCACB27E}" type="slidenum">
+            <a:fld id="{1B46A393-BB3F-4A03-A43E-61BA0938F011}" type="slidenum">
               <a:rPr lang="en-GB" sz="1000">
                 <a:solidFill>
                   <a:srgbClr val="8795A1"/>
@@ -19537,7 +19445,7 @@
       </p:sp>
       <p:sp>
         <p:nvSpPr>
-          <p:cNvPr id="76" name="!!chipUS17">
+          <p:cNvPr id="76" name="!!chipUS10">
             <a:extLst>
               <a:ext uri="{C183D7F6-B498-43B3-948B-1728B52AA6E4}">
                 <adec:decorative xmlns:adec="http://schemas.microsoft.com/office/drawing/2017/decorative" val="1"/>
@@ -19558,7 +19466,7 @@
             </a:avLst>
           </a:prstGeom>
           <a:solidFill>
-            <a:srgbClr val="F1EFE6"/>
+            <a:srgbClr val="F2EBF4"/>
           </a:solidFill>
           <a:ln>
             <a:noFill/>
@@ -19589,7 +19497,7 @@
       </p:sp>
       <p:sp>
         <p:nvSpPr>
-          <p:cNvPr id="77" name="!!chipbUS17">
+          <p:cNvPr id="77" name="!!chipbUS10">
             <a:extLst>
               <a:ext uri="{C183D7F6-B498-43B3-948B-1728B52AA6E4}">
                 <adec:decorative xmlns:adec="http://schemas.microsoft.com/office/drawing/2017/decorative" val="1"/>
@@ -19608,7 +19516,7 @@
             <a:avLst/>
           </a:prstGeom>
           <a:solidFill>
-            <a:srgbClr val="705B06"/>
+            <a:srgbClr val="7A3A95"/>
           </a:solidFill>
           <a:ln>
             <a:noFill/>
@@ -19639,7 +19547,7 @@
       </p:sp>
       <p:sp>
         <p:nvSpPr>
-          <p:cNvPr id="78" name="!!chiptUS17"/>
+          <p:cNvPr id="78" name="!!chiptUS10"/>
           <p:cNvSpPr txBox="1"/>
           <p:nvPr/>
         </p:nvSpPr>
@@ -19673,11 +19581,11 @@
             <a:r>
               <a:rPr sz="1400" b="1" i="0">
                 <a:solidFill>
-                  <a:srgbClr val="705B06"/>
+                  <a:srgbClr val="7A3A95"/>
                 </a:solidFill>
                 <a:latin typeface="Segoe UI"/>
               </a:rPr>
-              <a:t>Ch 17  </a:t>
+              <a:t>Ch 10  </a:t>
             </a:r>
             <a:r>
               <a:rPr sz="1400" b="0" i="0">
@@ -19686,14 +19594,14 @@
                 </a:solidFill>
                 <a:latin typeface="Segoe UI"/>
               </a:rPr>
-              <a:t>Learning from Examples</a:t>
-            </a:r>
-          </a:p>
-        </p:txBody>
-      </p:sp>
-      <p:sp>
-        <p:nvSpPr>
-          <p:cNvPr id="79" name="!!chipUS20">
+              <a:t>Knowledge Representation</a:t>
+            </a:r>
+          </a:p>
+        </p:txBody>
+      </p:sp>
+      <p:sp>
+        <p:nvSpPr>
+          <p:cNvPr id="79" name="!!chipUS17">
             <a:extLst>
               <a:ext uri="{C183D7F6-B498-43B3-948B-1728B52AA6E4}">
                 <adec:decorative xmlns:adec="http://schemas.microsoft.com/office/drawing/2017/decorative" val="1"/>
@@ -19745,7 +19653,7 @@
       </p:sp>
       <p:sp>
         <p:nvSpPr>
-          <p:cNvPr id="80" name="!!chipbUS20">
+          <p:cNvPr id="80" name="!!chipbUS17">
             <a:extLst>
               <a:ext uri="{C183D7F6-B498-43B3-948B-1728B52AA6E4}">
                 <adec:decorative xmlns:adec="http://schemas.microsoft.com/office/drawing/2017/decorative" val="1"/>
@@ -19795,7 +19703,7 @@
       </p:sp>
       <p:sp>
         <p:nvSpPr>
-          <p:cNvPr id="81" name="!!chiptUS20"/>
+          <p:cNvPr id="81" name="!!chiptUS17"/>
           <p:cNvSpPr txBox="1"/>
           <p:nvPr/>
         </p:nvSpPr>
@@ -19833,7 +19741,7 @@
                 </a:solidFill>
                 <a:latin typeface="Segoe UI"/>
               </a:rPr>
-              <a:t>Ch 20  </a:t>
+              <a:t>Ch 17  </a:t>
             </a:r>
             <a:r>
               <a:rPr sz="1400" b="0" i="0">
@@ -19842,7 +19750,7 @@
                 </a:solidFill>
                 <a:latin typeface="Segoe UI"/>
               </a:rPr>
-              <a:t>Recent Trends and Applications</a:t>
+              <a:t>Learning from Examples</a:t>
             </a:r>
           </a:p>
         </p:txBody>
@@ -20174,7 +20082,7 @@
               </a:rPr>
               <a:t>§1.6  ·  Handout p. 8     </a:t>
             </a:r>
-            <a:fld id="{6048F707-F29A-45D7-BBD1-B61E2DB924FC}" type="slidenum">
+            <a:fld id="{E8A2F9F2-C192-45A6-B441-F244364C119F}" type="slidenum">
               <a:rPr lang="en-GB" sz="1000">
                 <a:solidFill>
                   <a:srgbClr val="8795A1"/>
@@ -20964,7 +20872,7 @@
               </a:rPr>
               <a:t>§1.6  ·  Handout p. 8     </a:t>
             </a:r>
-            <a:fld id="{A6B970E5-E1CC-443F-941D-FD010FAF91CE}" type="slidenum">
+            <a:fld id="{F1DB622B-523C-4F56-9B09-B942C196621C}" type="slidenum">
               <a:rPr lang="en-GB" sz="1000">
                 <a:solidFill>
                   <a:srgbClr val="8795A1"/>
@@ -21923,7 +21831,7 @@
               </a:rPr>
               <a:t>§1.6  ·  Handout p. 8     </a:t>
             </a:r>
-            <a:fld id="{141366CB-F4B4-4CD4-95AD-55A700AE57E3}" type="slidenum">
+            <a:fld id="{CD58A7B8-2B8B-4B2A-BD3F-9FE12830C27C}" type="slidenum">
               <a:rPr lang="en-GB" sz="1000">
                 <a:solidFill>
                   <a:srgbClr val="8795A1"/>
@@ -23688,7 +23596,7 @@
               </a:rPr>
               <a:t>§1.6  ·  Handout p. 8     </a:t>
             </a:r>
-            <a:fld id="{02D55D5E-5D53-4DD1-9E26-2E7D254B9E45}" type="slidenum">
+            <a:fld id="{8A5E3B96-5EDE-4198-BABC-C5737290508E}" type="slidenum">
               <a:rPr lang="en-GB" sz="1000">
                 <a:solidFill>
                   <a:srgbClr val="8795A1"/>
@@ -24666,7 +24574,7 @@
               </a:rPr>
               <a:t>§1.6  ·  Handout p. 8     </a:t>
             </a:r>
-            <a:fld id="{15F04CD8-9EDB-43B6-81E3-40FCC6A734D3}" type="slidenum">
+            <a:fld id="{CDCE2AFE-8D2D-441A-9F92-92D67EBACB90}" type="slidenum">
               <a:rPr lang="en-GB" sz="1000">
                 <a:solidFill>
                   <a:srgbClr val="8795A1"/>
@@ -25909,7 +25817,7 @@
               </a:rPr>
               <a:t>§1.6  ·  Handout p. 8     </a:t>
             </a:r>
-            <a:fld id="{A20D4334-2201-4140-9182-5163868A9537}" type="slidenum">
+            <a:fld id="{CE668321-5C02-4DE6-912B-2BAE3FCCD44C}" type="slidenum">
               <a:rPr lang="en-GB" sz="1000">
                 <a:solidFill>
                   <a:srgbClr val="8795A1"/>
@@ -28578,7 +28486,7 @@
               </a:rPr>
               <a:t>§1.6  ·  Handout p. 8     </a:t>
             </a:r>
-            <a:fld id="{C7547E38-0586-40BA-8B64-0CEFB74544A8}" type="slidenum">
+            <a:fld id="{61F5D581-92E2-4F2D-90CE-DCC440031521}" type="slidenum">
               <a:rPr lang="en-GB" sz="1000">
                 <a:solidFill>
                   <a:srgbClr val="8795A1"/>
@@ -30542,7 +30450,7 @@
               </a:rPr>
               <a:t>§1.6  ·  Handout p. 8     </a:t>
             </a:r>
-            <a:fld id="{692F3B1A-D91D-490F-85A2-8FA397696BDC}" type="slidenum">
+            <a:fld id="{318636B2-6FB2-4B0D-B203-C53AD0042011}" type="slidenum">
               <a:rPr lang="en-GB" sz="1000">
                 <a:solidFill>
                   <a:srgbClr val="8795A1"/>
@@ -34062,7 +33970,7 @@
               </a:rPr>
               <a:t>§1.6  ·  Handout p. 8     </a:t>
             </a:r>
-            <a:fld id="{FAA4660E-43E9-4957-ACC5-E7252D0BE729}" type="slidenum">
+            <a:fld id="{4FB30B21-57FD-450E-AA44-ED720C530F61}" type="slidenum">
               <a:rPr lang="en-GB" sz="1000">
                 <a:solidFill>
                   <a:srgbClr val="8795A1"/>
@@ -36709,7 +36617,7 @@
               </a:rPr>
               <a:t>§1.6  ·  Handout p. 8     </a:t>
             </a:r>
-            <a:fld id="{1FDBAB2F-DA82-47F5-A8DE-FCAF0AB5BE4A}" type="slidenum">
+            <a:fld id="{D92C2B7B-EEEE-4F90-90EA-4D0995CAD7AA}" type="slidenum">
               <a:rPr lang="en-GB" sz="1000">
                 <a:solidFill>
                   <a:srgbClr val="8795A1"/>
@@ -37201,7 +37109,7 @@
               </a:rPr>
               <a:t>Handout p. 3     </a:t>
             </a:r>
-            <a:fld id="{D5561077-985E-4F49-9676-E573403DC7A9}" type="slidenum">
+            <a:fld id="{1269254D-F7A2-4A3E-80E5-E5C4644B6928}" type="slidenum">
               <a:rPr lang="en-GB" sz="1000">
                 <a:solidFill>
                   <a:srgbClr val="8795A1"/>
@@ -39100,7 +39008,7 @@
               </a:rPr>
               <a:t>Handout p. 12  ·  answers in Appendix D     </a:t>
             </a:r>
-            <a:fld id="{62FA71CA-97C0-4D62-BE98-53C86AA760DD}" type="slidenum">
+            <a:fld id="{D1A28D3C-A0D7-4E7D-9834-C257DD8A4F5D}" type="slidenum">
               <a:rPr lang="en-GB" sz="1000">
                 <a:solidFill>
                   <a:srgbClr val="D5DEE5"/>
@@ -39533,7 +39441,7 @@
               </a:rPr>
               <a:t>Handout p. 12  ·  answers in Appendix D     </a:t>
             </a:r>
-            <a:fld id="{12C8A1CB-86B0-4D0E-A571-E68E290A7F81}" type="slidenum">
+            <a:fld id="{BC123A4B-D1DC-4ECD-95AC-A309210C8615}" type="slidenum">
               <a:rPr lang="en-GB" sz="1000">
                 <a:solidFill>
                   <a:srgbClr val="8795A1"/>
@@ -39925,7 +39833,7 @@
               </a:rPr>
               <a:t>Handout p. 12  ·  answers in Appendix D     </a:t>
             </a:r>
-            <a:fld id="{8F7647DF-D9FF-42C3-BC99-71C0FD83D2F5}" type="slidenum">
+            <a:fld id="{1409C4BA-6888-4378-B1DF-77685BEB5070}" type="slidenum">
               <a:rPr lang="en-GB" sz="1000">
                 <a:solidFill>
                   <a:srgbClr val="D5DEE5"/>
@@ -40313,7 +40221,7 @@
               </a:rPr>
               <a:t>Handout p. 12  ·  answers in Appendix D     </a:t>
             </a:r>
-            <a:fld id="{BF8B532D-DA82-45E8-B6A5-BC7346266C43}" type="slidenum">
+            <a:fld id="{FDE2842E-CFA3-4A57-9732-0CA0CCC1FCEE}" type="slidenum">
               <a:rPr lang="en-GB" sz="1000">
                 <a:solidFill>
                   <a:srgbClr val="8795A1"/>
@@ -40705,7 +40613,7 @@
               </a:rPr>
               <a:t>Handout p. 12  ·  answers in Appendix D     </a:t>
             </a:r>
-            <a:fld id="{F6A46DCD-E01C-4AC5-85B7-93CF86E0923F}" type="slidenum">
+            <a:fld id="{46D131AF-678B-4F8C-B4D8-A860E93D5293}" type="slidenum">
               <a:rPr lang="en-GB" sz="1000">
                 <a:solidFill>
                   <a:srgbClr val="D5DEE5"/>
@@ -41057,7 +40965,7 @@
               </a:rPr>
               <a:t>Handout p. 12  ·  answers in Appendix D     </a:t>
             </a:r>
-            <a:fld id="{F89B25EF-3742-4426-9DA3-846F0482A178}" type="slidenum">
+            <a:fld id="{9B0991B1-C979-4E48-A670-85C7DD473B88}" type="slidenum">
               <a:rPr lang="en-GB" sz="1000">
                 <a:solidFill>
                   <a:srgbClr val="8795A1"/>
@@ -41396,7 +41304,7 @@
               </a:rPr>
               <a:t>Handout p. 12     </a:t>
             </a:r>
-            <a:fld id="{292AF656-E97C-4C1C-9EC3-19414A25A569}" type="slidenum">
+            <a:fld id="{D8A1FAE4-B7D5-46DB-A2C3-D62F3ECDDF6A}" type="slidenum">
               <a:rPr lang="en-GB" sz="1000">
                 <a:solidFill>
                   <a:srgbClr val="8795A1"/>
@@ -43126,7 +43034,7 @@
               </a:rPr>
               <a:t>Handout p. 12     </a:t>
             </a:r>
-            <a:fld id="{D2DC641B-6D71-400B-B5D6-87E25B4A848C}" type="slidenum">
+            <a:fld id="{39572874-8716-4ECF-AA19-D5FE106523B7}" type="slidenum">
               <a:rPr lang="en-GB" sz="1000">
                 <a:solidFill>
                   <a:srgbClr val="8795A1"/>
@@ -43760,7 +43668,7 @@
               </a:rPr>
               <a:t>Handout p. 12     </a:t>
             </a:r>
-            <a:fld id="{08C4EEF4-069D-4D20-9C5C-C3D21BFC3D4B}" type="slidenum">
+            <a:fld id="{78E79F9E-44E4-408C-A995-FEC6D6E4ABD5}" type="slidenum">
               <a:rPr lang="en-GB" sz="1000">
                 <a:solidFill>
                   <a:srgbClr val="8795A1"/>
@@ -44928,7 +44836,7 @@
               </a:rPr>
               <a:t>Handout p. 12     </a:t>
             </a:r>
-            <a:fld id="{280BA3A5-BCE0-44FA-8671-BFD30329BCAF}" type="slidenum">
+            <a:fld id="{3EC9812E-EACA-4950-9FDF-FB63DBD9D681}" type="slidenum">
               <a:rPr lang="en-GB" sz="1000">
                 <a:solidFill>
                   <a:srgbClr val="8795A1"/>
@@ -46096,7 +46004,7 @@
               </a:rPr>
               <a:t>Handout p. 3     </a:t>
             </a:r>
-            <a:fld id="{A7F1388F-1A2B-4E62-907B-646EA4B2101D}" type="slidenum">
+            <a:fld id="{119BA897-1BA6-47B6-A5E5-8CDABDE43C11}" type="slidenum">
               <a:rPr lang="en-GB" sz="1000">
                 <a:solidFill>
                   <a:srgbClr val="8795A1"/>
@@ -48685,7 +48593,7 @@
               </a:rPr>
               <a:t>Handout p. 12     </a:t>
             </a:r>
-            <a:fld id="{BF319D40-D0C3-48AE-B5B8-082F58A0038A}" type="slidenum">
+            <a:fld id="{72A02E7D-67EC-4BC0-A8D4-52D04EFD1FC4}" type="slidenum">
               <a:rPr lang="en-GB" sz="1000">
                 <a:solidFill>
                   <a:srgbClr val="8795A1"/>
@@ -49853,7 +49761,7 @@
               </a:rPr>
               <a:t>Handout p. 12     </a:t>
             </a:r>
-            <a:fld id="{A4EB6217-D798-41CA-96BB-C69041ED244B}" type="slidenum">
+            <a:fld id="{F6B03F83-EE96-40D6-8C70-7E132B6E526D}" type="slidenum">
               <a:rPr lang="en-GB" sz="1000">
                 <a:solidFill>
                   <a:srgbClr val="8795A1"/>
@@ -51021,7 +50929,7 @@
               </a:rPr>
               <a:t>Handout p. 12     </a:t>
             </a:r>
-            <a:fld id="{8A2BDC3D-B25B-4C49-904E-E0C03A5B8A71}" type="slidenum">
+            <a:fld id="{B9989337-1911-45C6-82D4-5D32835BE465}" type="slidenum">
               <a:rPr lang="en-GB" sz="1000">
                 <a:solidFill>
                   <a:srgbClr val="8795A1"/>
@@ -52373,7 +52281,7 @@
           <a:lstStyle/>
           <a:p>
             <a:pPr algn="r"/>
-            <a:fld id="{1E7D8CE1-55E1-4E72-8655-A6B1294FCFE7}" type="slidenum">
+            <a:fld id="{143EAF89-F286-483D-AF7D-801A8F8759D8}" type="slidenum">
               <a:rPr lang="en-GB" sz="1000">
                 <a:solidFill>
                   <a:srgbClr val="D5DEE5"/>
@@ -52612,7 +52520,7 @@
               </a:rPr>
               <a:t>Handout pp. 3–12     </a:t>
             </a:r>
-            <a:fld id="{8FED1E98-00C4-46C7-800F-27A4AC6D4109}" type="slidenum">
+            <a:fld id="{EED691CC-F5C3-49E7-A681-BD9EACAA0BB5}" type="slidenum">
               <a:rPr lang="en-GB" sz="1000">
                 <a:solidFill>
                   <a:srgbClr val="8795A1"/>
@@ -54349,7 +54257,7 @@
               </a:rPr>
               <a:t>§1.1  ·  Handout p. 3     </a:t>
             </a:r>
-            <a:fld id="{8BFC46DB-2D51-401E-AFEB-1D77DCDF77D6}" type="slidenum">
+            <a:fld id="{3C8A238C-2520-4B71-A60F-9CD9166009CA}" type="slidenum">
               <a:rPr lang="en-GB" sz="1000">
                 <a:solidFill>
                   <a:srgbClr val="8795A1"/>
@@ -55305,7 +55213,7 @@
               </a:rPr>
               <a:t>Handout §1.2     </a:t>
             </a:r>
-            <a:fld id="{8307D7E1-F720-456B-9443-1A43EBE1A9C5}" type="slidenum">
+            <a:fld id="{822032EB-5552-4B17-B6D8-DBD73E23484A}" type="slidenum">
               <a:rPr lang="en-GB" sz="1000">
                 <a:solidFill>
                   <a:srgbClr val="8795A1"/>
@@ -55608,7 +55516,7 @@
               </a:rPr>
               <a:t>§1.2  ·  Handout p. 4     </a:t>
             </a:r>
-            <a:fld id="{0916891A-A3E3-46D7-B2AC-7E7AAADA78C2}" type="slidenum">
+            <a:fld id="{306E7F88-405F-4AB2-B495-8B4207D66A07}" type="slidenum">
               <a:rPr lang="en-GB" sz="1000">
                 <a:solidFill>
                   <a:srgbClr val="8795A1"/>
@@ -56072,7 +55980,7 @@
               </a:rPr>
               <a:t>§1.2  ·  Handout p. 4     </a:t>
             </a:r>
-            <a:fld id="{96963CA7-1D45-48EA-B54F-D392B9627ACC}" type="slidenum">
+            <a:fld id="{89810AE3-90AD-48F6-B9CF-2F90936F4E4A}" type="slidenum">
               <a:rPr lang="en-GB" sz="1000">
                 <a:solidFill>
                   <a:srgbClr val="8795A1"/>
